--- a/美国产业政策报告/美国产业政策2024-2025.pptx
+++ b/美国产业政策报告/美国产业政策2024-2025.pptx
@@ -228,7 +228,7 @@
           <a:p>
             <a:fld id="{ECF79F2F-709D-4165-81E0-D39344765CAA}" type="datetimeFigureOut">
               <a:rPr lang="zh-CN" altLang="en-US" smtClean="0"/>
-              <a:t>2026/3/10</a:t>
+              <a:t>2026/3/19</a:t>
             </a:fld>
             <a:endParaRPr lang="zh-CN" altLang="en-US"/>
           </a:p>
@@ -642,7 +642,7 @@
           <a:p>
             <a:fld id="{6151C2EF-740A-4292-8406-DFDDC024222B}" type="datetime1">
               <a:rPr lang="zh-CN" altLang="en-US" smtClean="0"/>
-              <a:t>2026/3/10</a:t>
+              <a:t>2026/3/19</a:t>
             </a:fld>
             <a:endParaRPr lang="zh-CN" altLang="en-US"/>
           </a:p>
@@ -840,7 +840,7 @@
           <a:p>
             <a:fld id="{F1B7F664-8B44-4296-B431-8DB7C3792281}" type="datetime1">
               <a:rPr lang="zh-CN" altLang="en-US" smtClean="0"/>
-              <a:t>2026/3/10</a:t>
+              <a:t>2026/3/19</a:t>
             </a:fld>
             <a:endParaRPr lang="zh-CN" altLang="en-US"/>
           </a:p>
@@ -1048,7 +1048,7 @@
           <a:p>
             <a:fld id="{1AD6BD88-C4F0-450C-8E8B-011B70AC7A0A}" type="datetime1">
               <a:rPr lang="zh-CN" altLang="en-US" smtClean="0"/>
-              <a:t>2026/3/10</a:t>
+              <a:t>2026/3/19</a:t>
             </a:fld>
             <a:endParaRPr lang="zh-CN" altLang="en-US"/>
           </a:p>
@@ -1246,7 +1246,7 @@
           <a:p>
             <a:fld id="{24CDB906-2F76-49CC-AE9E-52EEC77CAEB7}" type="datetime1">
               <a:rPr lang="zh-CN" altLang="en-US" smtClean="0"/>
-              <a:t>2026/3/10</a:t>
+              <a:t>2026/3/19</a:t>
             </a:fld>
             <a:endParaRPr lang="zh-CN" altLang="en-US"/>
           </a:p>
@@ -1521,7 +1521,7 @@
           <a:p>
             <a:fld id="{08438E95-9FC5-4E7D-8F89-ECA9753104C3}" type="datetime1">
               <a:rPr lang="zh-CN" altLang="en-US" smtClean="0"/>
-              <a:t>2026/3/10</a:t>
+              <a:t>2026/3/19</a:t>
             </a:fld>
             <a:endParaRPr lang="zh-CN" altLang="en-US"/>
           </a:p>
@@ -1786,7 +1786,7 @@
           <a:p>
             <a:fld id="{606B113E-9217-475C-84BC-B55F4E594CAF}" type="datetime1">
               <a:rPr lang="zh-CN" altLang="en-US" smtClean="0"/>
-              <a:t>2026/3/10</a:t>
+              <a:t>2026/3/19</a:t>
             </a:fld>
             <a:endParaRPr lang="zh-CN" altLang="en-US"/>
           </a:p>
@@ -2198,7 +2198,7 @@
           <a:p>
             <a:fld id="{EEFFF51D-FD92-4984-9D67-4DCAE945B0F1}" type="datetime1">
               <a:rPr lang="zh-CN" altLang="en-US" smtClean="0"/>
-              <a:t>2026/3/10</a:t>
+              <a:t>2026/3/19</a:t>
             </a:fld>
             <a:endParaRPr lang="zh-CN" altLang="en-US"/>
           </a:p>
@@ -2339,7 +2339,7 @@
           <a:p>
             <a:fld id="{93A36A10-701C-4E4F-B80C-18406103741C}" type="datetime1">
               <a:rPr lang="zh-CN" altLang="en-US" smtClean="0"/>
-              <a:t>2026/3/10</a:t>
+              <a:t>2026/3/19</a:t>
             </a:fld>
             <a:endParaRPr lang="zh-CN" altLang="en-US"/>
           </a:p>
@@ -2452,7 +2452,7 @@
           <a:p>
             <a:fld id="{562BBC50-BE23-4481-8F55-17F0BEA3FC9E}" type="datetime1">
               <a:rPr lang="zh-CN" altLang="en-US" smtClean="0"/>
-              <a:t>2026/3/10</a:t>
+              <a:t>2026/3/19</a:t>
             </a:fld>
             <a:endParaRPr lang="zh-CN" altLang="en-US"/>
           </a:p>
@@ -2763,7 +2763,7 @@
           <a:p>
             <a:fld id="{AE1D066D-FB42-45E5-8E3C-34471206BF19}" type="datetime1">
               <a:rPr lang="zh-CN" altLang="en-US" smtClean="0"/>
-              <a:t>2026/3/10</a:t>
+              <a:t>2026/3/19</a:t>
             </a:fld>
             <a:endParaRPr lang="zh-CN" altLang="en-US"/>
           </a:p>
@@ -3051,7 +3051,7 @@
           <a:p>
             <a:fld id="{F6040A3F-F21C-4A63-B6D1-D1ADD4DB78E8}" type="datetime1">
               <a:rPr lang="zh-CN" altLang="en-US" smtClean="0"/>
-              <a:t>2026/3/10</a:t>
+              <a:t>2026/3/19</a:t>
             </a:fld>
             <a:endParaRPr lang="zh-CN" altLang="en-US"/>
           </a:p>
@@ -3294,7 +3294,7 @@
           <a:p>
             <a:fld id="{22514D38-C9ED-4B04-BCDC-EEC7C67689E6}" type="datetime1">
               <a:rPr lang="zh-CN" altLang="en-US" smtClean="0"/>
-              <a:t>2026/3/10</a:t>
+              <a:t>2026/3/19</a:t>
             </a:fld>
             <a:endParaRPr lang="zh-CN" altLang="en-US" dirty="0"/>
           </a:p>
@@ -9903,7 +9903,7 @@
         </p:nvSpPr>
         <p:spPr>
           <a:xfrm>
-            <a:off x="2565737" y="6596386"/>
+            <a:off x="1311695" y="6538912"/>
             <a:ext cx="1999265" cy="261610"/>
           </a:xfrm>
           <a:prstGeom prst="rect">
@@ -9981,6 +9981,80 @@
               <a:t>15</a:t>
             </a:fld>
             <a:endParaRPr lang="zh-CN" altLang="en-US"/>
+          </a:p>
+        </p:txBody>
+      </p:sp>
+      <p:sp>
+        <p:nvSpPr>
+          <p:cNvPr id="4" name="文本框 3">
+            <a:extLst>
+              <a:ext uri="{FF2B5EF4-FFF2-40B4-BE49-F238E27FC236}">
+                <a16:creationId xmlns:a16="http://schemas.microsoft.com/office/drawing/2014/main" id="{6112CB7A-4E7A-7877-6EC6-FAEADF8D8438}"/>
+              </a:ext>
+            </a:extLst>
+          </p:cNvPr>
+          <p:cNvSpPr txBox="1"/>
+          <p:nvPr/>
+        </p:nvSpPr>
+        <p:spPr>
+          <a:xfrm>
+            <a:off x="5034845" y="6308209"/>
+            <a:ext cx="5937844" cy="523220"/>
+          </a:xfrm>
+          <a:prstGeom prst="rect">
+            <a:avLst/>
+          </a:prstGeom>
+          <a:noFill/>
+        </p:spPr>
+        <p:txBody>
+          <a:bodyPr wrap="none" rtlCol="0">
+            <a:spAutoFit/>
+          </a:bodyPr>
+          <a:lstStyle/>
+          <a:p>
+            <a:r>
+              <a:rPr lang="en-US" altLang="zh-CN" sz="1400" dirty="0"/>
+              <a:t>SMR=</a:t>
+            </a:r>
+            <a:r>
+              <a:rPr lang="zh-CN" altLang="en-US" sz="1400" dirty="0"/>
+              <a:t>小型模块化反应堆     </a:t>
+            </a:r>
+            <a:r>
+              <a:rPr lang="en-US" altLang="zh-CN" sz="1400" dirty="0"/>
+              <a:t>MMR=</a:t>
+            </a:r>
+            <a:r>
+              <a:rPr lang="zh-CN" altLang="en-US" sz="1400" dirty="0"/>
+              <a:t>中型模块化反应堆</a:t>
+            </a:r>
+            <a:endParaRPr lang="en-US" altLang="zh-CN" sz="1400" dirty="0"/>
+          </a:p>
+          <a:p>
+            <a:r>
+              <a:rPr lang="en-US" altLang="zh-CN" sz="1400" dirty="0"/>
+              <a:t>TRISO = </a:t>
+            </a:r>
+            <a:r>
+              <a:rPr lang="zh-CN" altLang="en-US" sz="1400" dirty="0"/>
+              <a:t>三相微粒燃料   </a:t>
+            </a:r>
+            <a:r>
+              <a:rPr lang="en-US" altLang="zh-CN" sz="1400" dirty="0"/>
+              <a:t>LEU = </a:t>
+            </a:r>
+            <a:r>
+              <a:rPr lang="zh-CN" altLang="en-US" sz="1400" dirty="0"/>
+              <a:t>低浓度铀            </a:t>
+            </a:r>
+            <a:r>
+              <a:rPr lang="en-US" altLang="zh-CN" sz="1400" dirty="0"/>
+              <a:t>HALEU = </a:t>
+            </a:r>
+            <a:r>
+              <a:rPr lang="zh-CN" altLang="en-US" sz="1400" dirty="0"/>
+              <a:t>高丰度低浓度铀</a:t>
+            </a:r>
           </a:p>
         </p:txBody>
       </p:sp>
@@ -15458,7 +15532,7 @@
         </p:nvSpPr>
         <p:spPr>
           <a:xfrm>
-            <a:off x="561109" y="291234"/>
+            <a:off x="301465" y="29006"/>
             <a:ext cx="10515600" cy="1325563"/>
           </a:xfrm>
         </p:spPr>
@@ -15493,7 +15567,7 @@
         </p:nvSpPr>
         <p:spPr>
           <a:xfrm>
-            <a:off x="838200" y="1354569"/>
+            <a:off x="691445" y="1061058"/>
             <a:ext cx="10515600" cy="4955919"/>
           </a:xfrm>
         </p:spPr>
@@ -15608,6 +15682,18 @@
               <a:rPr lang="zh-CN" altLang="en-US" sz="2400" dirty="0"/>
               <a:t>工业界动作</a:t>
             </a:r>
+            <a:endParaRPr lang="en-US" altLang="zh-CN" sz="2400" dirty="0"/>
+          </a:p>
+          <a:p>
+            <a:pPr marL="0" indent="0">
+              <a:buNone/>
+            </a:pPr>
+            <a:endParaRPr lang="en-US" altLang="zh-CN" sz="2400" dirty="0"/>
+          </a:p>
+          <a:p>
+            <a:pPr marL="0" indent="0">
+              <a:buNone/>
+            </a:pPr>
             <a:endParaRPr lang="en-US" altLang="zh-CN" sz="2400" dirty="0"/>
           </a:p>
         </p:txBody>
@@ -15775,6 +15861,18 @@
               <a:rPr lang="zh-CN" altLang="zh-CN" sz="2000" dirty="0"/>
               <a:t>年长协，用于将人工智能工作流，数据处理模式和运行框架更好地嵌入美国陆军的作战和运行体系。</a:t>
             </a:r>
+            <a:r>
+              <a:rPr lang="zh-CN" altLang="en-US" sz="2000" dirty="0"/>
+              <a:t>总合同规模在</a:t>
+            </a:r>
+            <a:r>
+              <a:rPr lang="en-US" altLang="zh-CN" sz="2000" dirty="0"/>
+              <a:t>100</a:t>
+            </a:r>
+            <a:r>
+              <a:rPr lang="zh-CN" altLang="en-US" sz="2000" dirty="0"/>
+              <a:t>亿美元往上。</a:t>
+            </a:r>
             <a:endParaRPr lang="en-US" altLang="zh-CN" sz="2000" dirty="0"/>
           </a:p>
           <a:p>
@@ -16594,7 +16692,9 @@
           </a:xfrm>
         </p:spPr>
         <p:txBody>
-          <a:bodyPr/>
+          <a:bodyPr>
+            <a:normAutofit lnSpcReduction="10000"/>
+          </a:bodyPr>
           <a:lstStyle/>
           <a:p>
             <a:r>
@@ -16683,6 +16783,14 @@
             </a:r>
             <a:r>
               <a:rPr lang="zh-CN" altLang="en-US" sz="2000" dirty="0"/>
+              <a:t>亿。美国政府最高补贴</a:t>
+            </a:r>
+            <a:r>
+              <a:rPr lang="en-US" altLang="zh-CN" sz="2000" dirty="0"/>
+              <a:t>47</a:t>
+            </a:r>
+            <a:r>
+              <a:rPr lang="zh-CN" altLang="en-US" sz="2000" dirty="0"/>
               <a:t>亿</a:t>
             </a:r>
             <a:endParaRPr lang="en-US" altLang="zh-CN" sz="2000" dirty="0"/>
@@ -16717,7 +16825,23 @@
             </a:r>
             <a:r>
               <a:rPr lang="zh-CN" altLang="en-US" sz="2000" dirty="0"/>
-              <a:t>亿投资，并开启芯片学徒计划</a:t>
+              <a:t>亿投资，并开启芯片学徒计划。美国政府最高补贴</a:t>
+            </a:r>
+            <a:r>
+              <a:rPr lang="en-US" altLang="zh-CN" sz="2000" dirty="0"/>
+              <a:t>116</a:t>
+            </a:r>
+            <a:r>
+              <a:rPr lang="zh-CN" altLang="en-US" sz="2000" dirty="0"/>
+              <a:t>亿</a:t>
+            </a:r>
+            <a:r>
+              <a:rPr lang="en-US" altLang="zh-CN" sz="2000" dirty="0"/>
+              <a:t>+50</a:t>
+            </a:r>
+            <a:r>
+              <a:rPr lang="zh-CN" altLang="en-US" sz="2000" dirty="0"/>
+              <a:t>亿贷款。</a:t>
             </a:r>
             <a:endParaRPr lang="en-US" altLang="zh-CN" sz="2000" dirty="0"/>
           </a:p>
@@ -17386,6 +17510,10 @@
               <a:rPr lang="zh-CN" altLang="zh-CN" sz="2000" dirty="0"/>
               <a:t>验证和确认工业上可用的量子计算机。</a:t>
             </a:r>
+            <a:r>
+              <a:rPr lang="zh-CN" altLang="en-US" sz="2000" dirty="0"/>
+              <a:t>该计划涵盖超导，离子阱，中性原子，光子，硅自旋等路线</a:t>
+            </a:r>
             <a:endParaRPr lang="en-US" altLang="zh-CN" sz="2000" dirty="0"/>
           </a:p>
           <a:p>
@@ -19027,7 +19155,15 @@
             </a:r>
             <a:r>
               <a:rPr lang="zh-CN" altLang="en-US" sz="3200" dirty="0"/>
-              <a:t>其他技术</a:t>
+              <a:t>其他</a:t>
+            </a:r>
+            <a:r>
+              <a:rPr lang="en-US" altLang="zh-CN" sz="3200" dirty="0"/>
+              <a:t>Lab</a:t>
+            </a:r>
+            <a:r>
+              <a:rPr lang="zh-CN" altLang="en-US" sz="3200" dirty="0"/>
+              <a:t>阶段技术</a:t>
             </a:r>
           </a:p>
         </p:txBody>
